--- a/docs/customer-documents/orgcomp-series/Vol_IX_Book_01_OrgComp_Helpdesk_ITSM_Catalog.pptx
+++ b/docs/customer-documents/orgcomp-series/Vol_IX_Book_01_OrgComp_Helpdesk_ITSM_Catalog.pptx
@@ -516,7 +516,7 @@
           <a:p/>
           <a:p>
             <a:r>
-              <a:t>Vendor sources: host repo: docs/customer-documents/federal-aan-series/servicenow-day2/helpdesk-control-map.json</a:t>
+              <a:t>Vendor sources: host repo: docs/customer-documents/orgcomp-series/servicenow-day2/helpdesk-control-map.json</a:t>
             </a:r>
           </a:p>
         </p:txBody>
@@ -1042,7 +1042,7 @@
           <a:p/>
           <a:p>
             <a:r>
-              <a:t>Vendor sources: host repo: docs/customer-documents/federal-aan-series/aan-compliance-spine.yml</a:t>
+              <a:t>Vendor sources: host repo: docs/customer-documents/orgcomp-series/orgcomp-compliance-spine.yml</a:t>
             </a:r>
           </a:p>
         </p:txBody>
@@ -4877,7 +4877,7 @@
                 </a:solidFill>
                 <a:latin typeface="Arial"/>
               </a:rPr>
-              <a:t>Date Code: 2026-07-12 15:00 ET</a:t>
+              <a:t>Date Code: 2026-07-21 14:46 ET</a:t>
             </a:r>
           </a:p>
         </p:txBody>
@@ -5065,7 +5065,7 @@
                 </a:solidFill>
                 <a:latin typeface="Arial"/>
               </a:rPr>
-              <a:t>Helpdesk &amp; ITSM Catalog · Date Code: 2026-07-12 15:00 ET</a:t>
+              <a:t>Helpdesk &amp; ITSM Catalog · Date Code: 2026-07-21 14:46 ET</a:t>
             </a:r>
           </a:p>
         </p:txBody>
@@ -5288,7 +5288,7 @@
                 </a:solidFill>
                 <a:latin typeface="Arial"/>
               </a:rPr>
-              <a:t>Helpdesk &amp; ITSM Catalog · Date Code: 2026-07-12 15:00 ET</a:t>
+              <a:t>Helpdesk &amp; ITSM Catalog · Date Code: 2026-07-21 14:46 ET</a:t>
             </a:r>
           </a:p>
         </p:txBody>
@@ -6195,7 +6195,7 @@
                 </a:solidFill>
                 <a:latin typeface="Arial"/>
               </a:rPr>
-              <a:t>Helpdesk &amp; ITSM Catalog · Date Code: 2026-07-12 15:00 ET</a:t>
+              <a:t>Helpdesk &amp; ITSM Catalog · Date Code: 2026-07-21 14:46 ET</a:t>
             </a:r>
           </a:p>
         </p:txBody>
@@ -7189,7 +7189,7 @@
                 </a:solidFill>
                 <a:latin typeface="Arial"/>
               </a:rPr>
-              <a:t>Helpdesk &amp; ITSM Catalog · Date Code: 2026-07-12 15:00 ET</a:t>
+              <a:t>Helpdesk &amp; ITSM Catalog · Date Code: 2026-07-21 14:46 ET</a:t>
             </a:r>
           </a:p>
         </p:txBody>
@@ -8183,7 +8183,7 @@
                 </a:solidFill>
                 <a:latin typeface="Arial"/>
               </a:rPr>
-              <a:t>Helpdesk &amp; ITSM Catalog · Date Code: 2026-07-12 15:00 ET</a:t>
+              <a:t>Helpdesk &amp; ITSM Catalog · Date Code: 2026-07-21 14:46 ET</a:t>
             </a:r>
           </a:p>
         </p:txBody>
@@ -9177,7 +9177,7 @@
                 </a:solidFill>
                 <a:latin typeface="Arial"/>
               </a:rPr>
-              <a:t>Helpdesk &amp; ITSM Catalog · Date Code: 2026-07-12 15:00 ET</a:t>
+              <a:t>Helpdesk &amp; ITSM Catalog · Date Code: 2026-07-21 14:46 ET</a:t>
             </a:r>
           </a:p>
         </p:txBody>
@@ -10171,7 +10171,7 @@
                 </a:solidFill>
                 <a:latin typeface="Arial"/>
               </a:rPr>
-              <a:t>Helpdesk &amp; ITSM Catalog · Date Code: 2026-07-12 15:00 ET</a:t>
+              <a:t>Helpdesk &amp; ITSM Catalog · Date Code: 2026-07-21 14:46 ET</a:t>
             </a:r>
           </a:p>
         </p:txBody>
@@ -10761,7 +10761,7 @@
                 </a:solidFill>
                 <a:latin typeface="Arial"/>
               </a:rPr>
-              <a:t>Helpdesk &amp; ITSM Catalog · Date Code: 2026-07-12 15:00 ET</a:t>
+              <a:t>Helpdesk &amp; ITSM Catalog · Date Code: 2026-07-21 14:46 ET</a:t>
             </a:r>
           </a:p>
         </p:txBody>
